--- a/프레젠테이션1.pptx
+++ b/프레젠테이션1.pptx
@@ -107,6 +107,11 @@
       </a:defRPr>
     </a:lvl9pPr>
   </p:defaultTextStyle>
+  <p:extLst>
+    <p:ext uri="{EFAFB233-063F-42B5-8137-9DF3F51BA10A}">
+      <p15:sldGuideLst xmlns:p15="http://schemas.microsoft.com/office/powerpoint/2012/main"/>
+    </p:ext>
+  </p:extLst>
 </p:presentation>
 </file>
 
@@ -257,7 +262,7 @@
           <a:p>
             <a:fld id="{E64D31E8-861E-47CC-A1CF-3E9DC38BF0D3}" type="datetimeFigureOut">
               <a:rPr lang="ko-KR" altLang="en-US" smtClean="0"/>
-              <a:t>2026-06-15</a:t>
+              <a:t>2026-06-21</a:t>
             </a:fld>
             <a:endParaRPr lang="ko-KR" altLang="en-US"/>
           </a:p>
@@ -455,7 +460,7 @@
           <a:p>
             <a:fld id="{E64D31E8-861E-47CC-A1CF-3E9DC38BF0D3}" type="datetimeFigureOut">
               <a:rPr lang="ko-KR" altLang="en-US" smtClean="0"/>
-              <a:t>2026-06-15</a:t>
+              <a:t>2026-06-21</a:t>
             </a:fld>
             <a:endParaRPr lang="ko-KR" altLang="en-US"/>
           </a:p>
@@ -663,7 +668,7 @@
           <a:p>
             <a:fld id="{E64D31E8-861E-47CC-A1CF-3E9DC38BF0D3}" type="datetimeFigureOut">
               <a:rPr lang="ko-KR" altLang="en-US" smtClean="0"/>
-              <a:t>2026-06-15</a:t>
+              <a:t>2026-06-21</a:t>
             </a:fld>
             <a:endParaRPr lang="ko-KR" altLang="en-US"/>
           </a:p>
@@ -861,7 +866,7 @@
           <a:p>
             <a:fld id="{E64D31E8-861E-47CC-A1CF-3E9DC38BF0D3}" type="datetimeFigureOut">
               <a:rPr lang="ko-KR" altLang="en-US" smtClean="0"/>
-              <a:t>2026-06-15</a:t>
+              <a:t>2026-06-21</a:t>
             </a:fld>
             <a:endParaRPr lang="ko-KR" altLang="en-US"/>
           </a:p>
@@ -1136,7 +1141,7 @@
           <a:p>
             <a:fld id="{E64D31E8-861E-47CC-A1CF-3E9DC38BF0D3}" type="datetimeFigureOut">
               <a:rPr lang="ko-KR" altLang="en-US" smtClean="0"/>
-              <a:t>2026-06-15</a:t>
+              <a:t>2026-06-21</a:t>
             </a:fld>
             <a:endParaRPr lang="ko-KR" altLang="en-US"/>
           </a:p>
@@ -1401,7 +1406,7 @@
           <a:p>
             <a:fld id="{E64D31E8-861E-47CC-A1CF-3E9DC38BF0D3}" type="datetimeFigureOut">
               <a:rPr lang="ko-KR" altLang="en-US" smtClean="0"/>
-              <a:t>2026-06-15</a:t>
+              <a:t>2026-06-21</a:t>
             </a:fld>
             <a:endParaRPr lang="ko-KR" altLang="en-US"/>
           </a:p>
@@ -1813,7 +1818,7 @@
           <a:p>
             <a:fld id="{E64D31E8-861E-47CC-A1CF-3E9DC38BF0D3}" type="datetimeFigureOut">
               <a:rPr lang="ko-KR" altLang="en-US" smtClean="0"/>
-              <a:t>2026-06-15</a:t>
+              <a:t>2026-06-21</a:t>
             </a:fld>
             <a:endParaRPr lang="ko-KR" altLang="en-US"/>
           </a:p>
@@ -1954,7 +1959,7 @@
           <a:p>
             <a:fld id="{E64D31E8-861E-47CC-A1CF-3E9DC38BF0D3}" type="datetimeFigureOut">
               <a:rPr lang="ko-KR" altLang="en-US" smtClean="0"/>
-              <a:t>2026-06-15</a:t>
+              <a:t>2026-06-21</a:t>
             </a:fld>
             <a:endParaRPr lang="ko-KR" altLang="en-US"/>
           </a:p>
@@ -2067,7 +2072,7 @@
           <a:p>
             <a:fld id="{E64D31E8-861E-47CC-A1CF-3E9DC38BF0D3}" type="datetimeFigureOut">
               <a:rPr lang="ko-KR" altLang="en-US" smtClean="0"/>
-              <a:t>2026-06-15</a:t>
+              <a:t>2026-06-21</a:t>
             </a:fld>
             <a:endParaRPr lang="ko-KR" altLang="en-US"/>
           </a:p>
@@ -2378,7 +2383,7 @@
           <a:p>
             <a:fld id="{E64D31E8-861E-47CC-A1CF-3E9DC38BF0D3}" type="datetimeFigureOut">
               <a:rPr lang="ko-KR" altLang="en-US" smtClean="0"/>
-              <a:t>2026-06-15</a:t>
+              <a:t>2026-06-21</a:t>
             </a:fld>
             <a:endParaRPr lang="ko-KR" altLang="en-US"/>
           </a:p>
@@ -2666,7 +2671,7 @@
           <a:p>
             <a:fld id="{E64D31E8-861E-47CC-A1CF-3E9DC38BF0D3}" type="datetimeFigureOut">
               <a:rPr lang="ko-KR" altLang="en-US" smtClean="0"/>
-              <a:t>2026-06-15</a:t>
+              <a:t>2026-06-21</a:t>
             </a:fld>
             <a:endParaRPr lang="ko-KR" altLang="en-US"/>
           </a:p>
@@ -2907,7 +2912,7 @@
           <a:p>
             <a:fld id="{E64D31E8-861E-47CC-A1CF-3E9DC38BF0D3}" type="datetimeFigureOut">
               <a:rPr lang="ko-KR" altLang="en-US" smtClean="0"/>
-              <a:t>2026-06-15</a:t>
+              <a:t>2026-06-21</a:t>
             </a:fld>
             <a:endParaRPr lang="ko-KR" altLang="en-US"/>
           </a:p>
@@ -3478,10 +3483,10 @@
       </p:pic>
       <p:pic>
         <p:nvPicPr>
-          <p:cNvPr id="36" name="그림 35">
-            <a:extLst>
-              <a:ext uri="{FF2B5EF4-FFF2-40B4-BE49-F238E27FC236}">
-                <a16:creationId xmlns:a16="http://schemas.microsoft.com/office/drawing/2014/main" id="{4AE3D2FB-0BB5-44C2-9D8B-D8C534DF1654}"/>
+          <p:cNvPr id="10" name="내용 개체 틀 8">
+            <a:extLst>
+              <a:ext uri="{FF2B5EF4-FFF2-40B4-BE49-F238E27FC236}">
+                <a16:creationId xmlns:a16="http://schemas.microsoft.com/office/drawing/2014/main" id="{99FDD080-2D73-4AB9-9F7F-0B2A4EDB9DE5}"/>
               </a:ext>
             </a:extLst>
           </p:cNvPr>
@@ -3490,16 +3495,21 @@
           </p:cNvPicPr>
           <p:nvPr/>
         </p:nvPicPr>
-        <p:blipFill>
-          <a:blip r:embed="rId3"/>
-          <a:stretch>
-            <a:fillRect/>
-          </a:stretch>
+        <p:blipFill rotWithShape="1">
+          <a:blip r:embed="rId3">
+            <a:extLst>
+              <a:ext uri="{28A0092B-C50C-407E-A947-70E740481C1C}">
+                <a14:useLocalDpi xmlns:a14="http://schemas.microsoft.com/office/drawing/2010/main" val="0"/>
+              </a:ext>
+            </a:extLst>
+          </a:blip>
+          <a:srcRect b="49452"/>
+          <a:stretch/>
         </p:blipFill>
         <p:spPr>
           <a:xfrm>
-            <a:off x="2134410" y="1135962"/>
-            <a:ext cx="4390850" cy="1945985"/>
+            <a:off x="2239394" y="3052755"/>
+            <a:ext cx="4118437" cy="1778516"/>
           </a:xfrm>
           <a:prstGeom prst="rect">
             <a:avLst/>
@@ -3508,10 +3518,10 @@
       </p:pic>
       <p:pic>
         <p:nvPicPr>
-          <p:cNvPr id="43" name="그림 42">
-            <a:extLst>
-              <a:ext uri="{FF2B5EF4-FFF2-40B4-BE49-F238E27FC236}">
-                <a16:creationId xmlns:a16="http://schemas.microsoft.com/office/drawing/2014/main" id="{B4DFED68-24EB-43E0-9DE9-4599A0658935}"/>
+          <p:cNvPr id="11" name="그림 10">
+            <a:extLst>
+              <a:ext uri="{FF2B5EF4-FFF2-40B4-BE49-F238E27FC236}">
+                <a16:creationId xmlns:a16="http://schemas.microsoft.com/office/drawing/2014/main" id="{8440917C-8482-410C-8062-DCA33B0A921E}"/>
               </a:ext>
             </a:extLst>
           </p:cNvPr>
@@ -3528,13 +3538,13 @@
               </a:ext>
             </a:extLst>
           </a:blip>
-          <a:srcRect t="10309" b="48570"/>
+          <a:srcRect t="-3249" b="3249"/>
           <a:stretch/>
         </p:blipFill>
         <p:spPr>
           <a:xfrm>
-            <a:off x="2164612" y="3444412"/>
-            <a:ext cx="4468339" cy="1569740"/>
+            <a:off x="2270615" y="1397415"/>
+            <a:ext cx="4118437" cy="1655340"/>
           </a:xfrm>
           <a:prstGeom prst="rect">
             <a:avLst/>
@@ -3809,7 +3819,7 @@
         </p:blipFill>
         <p:spPr>
           <a:xfrm>
-            <a:off x="842629" y="1615632"/>
+            <a:off x="1098763" y="323434"/>
             <a:ext cx="4413887" cy="3572566"/>
           </a:xfrm>
           <a:prstGeom prst="rect">
